--- a/备选资产/结构图/层级金字塔-001/example.pptx
+++ b/备选资产/结构图/层级金字塔-001/example.pptx
@@ -2,13 +2,13 @@
 <file path=ppt/presentation.xml><?xml version="1.0" encoding="utf-8"?>
 <p:presentation xmlns:p="http://schemas.openxmlformats.org/presentationml/2006/main">
   <p:sldMasterIdLst>
-    <p:sldMasterId xmlns:r="http://schemas.openxmlformats.org/officeDocument/2006/relationships" id="2147483648" r:id="R8c8c74b8edfb4a02"/>
+    <p:sldMasterId xmlns:r="http://schemas.openxmlformats.org/officeDocument/2006/relationships" id="2147483648" r:id="Rebcc80b2a85c492f"/>
   </p:sldMasterIdLst>
   <p:notesMasterIdLst>
-    <p:notesMasterId xmlns:r="http://schemas.openxmlformats.org/officeDocument/2006/relationships" r:id="Raf90f91a8ed64e46"/>
+    <p:notesMasterId xmlns:r="http://schemas.openxmlformats.org/officeDocument/2006/relationships" r:id="R6a665f2286e14e9d"/>
   </p:notesMasterIdLst>
   <p:sldIdLst>
-    <p:sldId xmlns:r="http://schemas.openxmlformats.org/officeDocument/2006/relationships" id="256" r:id="R99641318115d4dec"/>
+    <p:sldId xmlns:r="http://schemas.openxmlformats.org/officeDocument/2006/relationships" id="256" r:id="R54ed30155818484d"/>
   </p:sldIdLst>
   <p:sldSz cx="12192000" cy="6858000"/>
   <p:notesSz cx="6858000" cy="9144000"/>
@@ -506,7 +506,7 @@
   </p:cSld>
   <p:clrMap bg1="lt1" tx1="dk1" bg2="lt2" tx2="dk2" accent1="accent1" accent2="accent2" accent3="accent3" accent4="accent4" accent5="accent5" accent6="accent6" hlink="hlink" folHlink="folHlink"/>
   <p:sldLayoutIdLst>
-    <p:sldLayoutId xmlns:r="http://schemas.openxmlformats.org/officeDocument/2006/relationships" id="2147483649" r:id="R3fd664139d7b4a21"/>
+    <p:sldLayoutId xmlns:r="http://schemas.openxmlformats.org/officeDocument/2006/relationships" id="2147483649" r:id="R5f867800321f4fda"/>
   </p:sldLayoutIdLst>
   <p:txStyles>
     <p:titleStyle>
@@ -1054,10 +1054,10 @@
       </p:grpSpPr>
       <p:sp>
         <p:nvSpPr>
-          <p:cNvPr id="11" name="">
-            <a:extLst xmlns:a="http://schemas.openxmlformats.org/drawingml/2006/main">
-              <a:ext uri="{FF2B5EF4-FFF2-40B4-BE49-F238E27FC236}">
-                <a16:creationId xmlns:a16="http://schemas.microsoft.com/office/drawing/2014/main" id="{F24FBBA1-06B1-4218-9C61-0EBE6615F202}"/>
+          <p:cNvPr id="34" name="">
+            <a:extLst xmlns:a="http://schemas.openxmlformats.org/drawingml/2006/main">
+              <a:ext uri="{FF2B5EF4-FFF2-40B4-BE49-F238E27FC236}">
+                <a16:creationId xmlns:a16="http://schemas.microsoft.com/office/drawing/2014/main" id="{4FC62A9E-20C7-4959-A251-48D953571ABD}"/>
               </a:ext>
             </a:extLst>
           </p:cNvPr>
@@ -1115,7 +1115,7 @@
           <p:cNvPr id="2" name="">
             <a:extLst xmlns:a="http://schemas.openxmlformats.org/drawingml/2006/main">
               <a:ext uri="{FF2B5EF4-FFF2-40B4-BE49-F238E27FC236}">
-                <a16:creationId xmlns:a16="http://schemas.microsoft.com/office/drawing/2014/main" id="{C3E971AF-7F3A-44D4-A471-847617817D6C}"/>
+                <a16:creationId xmlns:a16="http://schemas.microsoft.com/office/drawing/2014/main" id="{C4F004EB-55BA-41E5-BC3A-3FDE22968062}"/>
               </a:ext>
             </a:extLst>
           </p:cNvPr>
@@ -1163,35 +1163,256 @@
                 <a:ea typeface="Microsoft YaHei"/>
                 <a:cs typeface="Microsoft YaHei"/>
               </a:rPr>
-              <a:t>层级金字塔</a:t>
+              <a:t>战略层级 · 能力递进</a:t>
             </a:r>
           </a:p>
         </p:txBody>
       </p:sp>
       <p:sp>
         <p:nvSpPr>
-          <p:cNvPr id="3" name="">
-            <a:extLst xmlns:a="http://schemas.openxmlformats.org/drawingml/2006/main">
-              <a:ext uri="{FF2B5EF4-FFF2-40B4-BE49-F238E27FC236}">
-                <a16:creationId xmlns:a16="http://schemas.microsoft.com/office/drawing/2014/main" id="{047CFBE6-059C-4365-A49C-227801E1AB26}"/>
-              </a:ext>
-            </a:extLst>
-          </p:cNvPr>
-          <p:cNvSpPr>
-            <a:spLocks xmlns:a="http://schemas.openxmlformats.org/drawingml/2006/main" noGrp="1"/>
-          </p:cNvSpPr>
-          <p:nvPr/>
-        </p:nvSpPr>
-        <p:spPr>
-          <a:xfrm xmlns:a="http://schemas.openxmlformats.org/drawingml/2006/main">
-            <a:off x="2571750" y="1428750"/>
-            <a:ext cx="2000250" cy="1047750"/>
+          <p:cNvPr id="3" name="PPAGENT_QA|parent=hierarchy-level-0|domains=hierarchy-shape,hierarchy-content">
+            <a:extLst xmlns:a="http://schemas.openxmlformats.org/drawingml/2006/main">
+              <a:ext uri="{FF2B5EF4-FFF2-40B4-BE49-F238E27FC236}">
+                <a16:creationId xmlns:a16="http://schemas.microsoft.com/office/drawing/2014/main" id="{7E4860E6-3C86-4C94-B805-F5251255DE74}"/>
+              </a:ext>
+            </a:extLst>
+          </p:cNvPr>
+          <p:cNvSpPr>
+            <a:spLocks xmlns:a="http://schemas.openxmlformats.org/drawingml/2006/main" noGrp="1"/>
+          </p:cNvSpPr>
+          <p:nvPr/>
+        </p:nvSpPr>
+        <p:spPr>
+          <a:xfrm xmlns:a="http://schemas.openxmlformats.org/drawingml/2006/main">
+            <a:off x="2476500" y="1504950"/>
+            <a:ext cx="1714500" cy="1042988"/>
           </a:xfrm>
           <a:prstGeom xmlns:a="http://schemas.openxmlformats.org/drawingml/2006/main" prst="trapezoid">
             <a:avLst/>
           </a:prstGeom>
           <a:solidFill xmlns:a="http://schemas.openxmlformats.org/drawingml/2006/main">
-            <a:srgbClr val="14CBD1"/>
+            <a:srgbClr val="2AC7CE"/>
+          </a:solidFill>
+          <a:ln xmlns:a="http://schemas.openxmlformats.org/drawingml/2006/main" w="19050">
+            <a:solidFill>
+              <a:srgbClr val="FFFFFF"/>
+            </a:solidFill>
+            <a:prstDash val="solid"/>
+          </a:ln>
+        </p:spPr>
+        <p:style>
+          <a:lnRef xmlns:a="http://schemas.openxmlformats.org/drawingml/2006/main" idx="0"/>
+          <a:fillRef xmlns:a="http://schemas.openxmlformats.org/drawingml/2006/main" idx="0"/>
+          <a:effectRef xmlns:a="http://schemas.openxmlformats.org/drawingml/2006/main" idx="4"/>
+          <a:fontRef xmlns:a="http://schemas.openxmlformats.org/drawingml/2006/main" idx="major"/>
+        </p:style>
+      </p:sp>
+      <p:sp>
+        <p:nvSpPr>
+          <p:cNvPr id="4" name="">
+            <a:extLst xmlns:a="http://schemas.openxmlformats.org/drawingml/2006/main">
+              <a:ext uri="{FF2B5EF4-FFF2-40B4-BE49-F238E27FC236}">
+                <a16:creationId xmlns:a16="http://schemas.microsoft.com/office/drawing/2014/main" id="{07EF9638-A518-4129-8CB5-56618A31C250}"/>
+              </a:ext>
+            </a:extLst>
+          </p:cNvPr>
+          <p:cNvSpPr>
+            <a:spLocks xmlns:a="http://schemas.openxmlformats.org/drawingml/2006/main" noGrp="1"/>
+          </p:cNvSpPr>
+          <p:nvPr/>
+        </p:nvSpPr>
+        <p:spPr>
+          <a:xfrm xmlns:a="http://schemas.openxmlformats.org/drawingml/2006/main">
+            <a:off x="2628900" y="1628775"/>
+            <a:ext cx="1409700" cy="285750"/>
+          </a:xfrm>
+          <a:prstGeom xmlns:a="http://schemas.openxmlformats.org/drawingml/2006/main" prst="rect">
+            <a:avLst/>
+          </a:prstGeom>
+          <a:noFill xmlns:a="http://schemas.openxmlformats.org/drawingml/2006/main"/>
+          <a:ln xmlns:a="http://schemas.openxmlformats.org/drawingml/2006/main" w="0">
+            <a:noFill/>
+            <a:prstDash val="solid"/>
+          </a:ln>
+        </p:spPr>
+        <p:txBody>
+          <a:bodyPr xmlns:a="http://schemas.openxmlformats.org/drawingml/2006/main" lIns="0" tIns="0" rIns="0" bIns="0" anchor="ctr">
+            <a:normAutofit fontScale="100000"/>
+          </a:bodyPr>
+          <a:lstStyle xmlns:a="http://schemas.openxmlformats.org/drawingml/2006/main"/>
+          <a:p xmlns:a="http://schemas.openxmlformats.org/drawingml/2006/main">
+            <a:pPr algn="ctr">
+              <a:defRPr sz="1500" b="1">
+                <a:solidFill>
+                  <a:srgbClr val="FFFFFF"/>
+                </a:solidFill>
+                <a:latin typeface="Microsoft YaHei"/>
+                <a:ea typeface="Microsoft YaHei"/>
+                <a:cs typeface="Microsoft YaHei"/>
+              </a:defRPr>
+            </a:pPr>
+            <a:r>
+              <a:rPr sz="1500" b="1">
+                <a:solidFill>
+                  <a:srgbClr val="FFFFFF"/>
+                </a:solidFill>
+                <a:latin typeface="Microsoft YaHei"/>
+                <a:ea typeface="Microsoft YaHei"/>
+                <a:cs typeface="Microsoft YaHei"/>
+              </a:rPr>
+              <a:t>方向层</a:t>
+            </a:r>
+          </a:p>
+        </p:txBody>
+      </p:sp>
+      <p:sp>
+        <p:nvSpPr>
+          <p:cNvPr id="5" name="">
+            <a:extLst xmlns:a="http://schemas.openxmlformats.org/drawingml/2006/main">
+              <a:ext uri="{FF2B5EF4-FFF2-40B4-BE49-F238E27FC236}">
+                <a16:creationId xmlns:a16="http://schemas.microsoft.com/office/drawing/2014/main" id="{0808BF6C-B2F6-434C-A9D4-9E4AFF7F4B15}"/>
+              </a:ext>
+            </a:extLst>
+          </p:cNvPr>
+          <p:cNvSpPr>
+            <a:spLocks xmlns:a="http://schemas.openxmlformats.org/drawingml/2006/main" noGrp="1"/>
+          </p:cNvSpPr>
+          <p:nvPr/>
+        </p:nvSpPr>
+        <p:spPr>
+          <a:xfrm xmlns:a="http://schemas.openxmlformats.org/drawingml/2006/main">
+            <a:off x="2628900" y="1914525"/>
+            <a:ext cx="1409700" cy="238125"/>
+          </a:xfrm>
+          <a:prstGeom xmlns:a="http://schemas.openxmlformats.org/drawingml/2006/main" prst="rect">
+            <a:avLst/>
+          </a:prstGeom>
+          <a:noFill xmlns:a="http://schemas.openxmlformats.org/drawingml/2006/main"/>
+          <a:ln xmlns:a="http://schemas.openxmlformats.org/drawingml/2006/main" w="0">
+            <a:noFill/>
+            <a:prstDash val="solid"/>
+          </a:ln>
+        </p:spPr>
+        <p:txBody>
+          <a:bodyPr xmlns:a="http://schemas.openxmlformats.org/drawingml/2006/main" lIns="0" tIns="0" rIns="0" bIns="0" anchor="ctr">
+            <a:normAutofit fontScale="100000"/>
+          </a:bodyPr>
+          <a:lstStyle xmlns:a="http://schemas.openxmlformats.org/drawingml/2006/main"/>
+          <a:p xmlns:a="http://schemas.openxmlformats.org/drawingml/2006/main">
+            <a:pPr algn="ctr">
+              <a:defRPr sz="1350" b="1">
+                <a:solidFill>
+                  <a:srgbClr val="DFF9FB"/>
+                </a:solidFill>
+                <a:latin typeface="Microsoft YaHei"/>
+                <a:ea typeface="Microsoft YaHei"/>
+                <a:cs typeface="Microsoft YaHei"/>
+              </a:defRPr>
+            </a:pPr>
+            <a:r>
+              <a:rPr sz="1350" b="1">
+                <a:solidFill>
+                  <a:srgbClr val="DFF9FB"/>
+                </a:solidFill>
+                <a:latin typeface="Microsoft YaHei"/>
+                <a:ea typeface="Microsoft YaHei"/>
+                <a:cs typeface="Microsoft YaHei"/>
+              </a:rPr>
+              <a:t>WHY</a:t>
+            </a:r>
+          </a:p>
+        </p:txBody>
+      </p:sp>
+      <p:sp>
+        <p:nvSpPr>
+          <p:cNvPr id="6" name="">
+            <a:extLst xmlns:a="http://schemas.openxmlformats.org/drawingml/2006/main">
+              <a:ext uri="{FF2B5EF4-FFF2-40B4-BE49-F238E27FC236}">
+                <a16:creationId xmlns:a16="http://schemas.microsoft.com/office/drawing/2014/main" id="{9C3549C3-E99C-44F9-A5B6-2542AED2037F}"/>
+              </a:ext>
+            </a:extLst>
+          </p:cNvPr>
+          <p:cNvSpPr>
+            <a:spLocks xmlns:a="http://schemas.openxmlformats.org/drawingml/2006/main" noGrp="1"/>
+          </p:cNvSpPr>
+          <p:nvPr/>
+        </p:nvSpPr>
+        <p:spPr>
+          <a:xfrm xmlns:a="http://schemas.openxmlformats.org/drawingml/2006/main">
+            <a:off x="2305050" y="2452688"/>
+            <a:ext cx="2057400" cy="266700"/>
+          </a:xfrm>
+          <a:prstGeom xmlns:a="http://schemas.openxmlformats.org/drawingml/2006/main" prst="ellipse">
+            <a:avLst/>
+          </a:prstGeom>
+          <a:noFill xmlns:a="http://schemas.openxmlformats.org/drawingml/2006/main"/>
+          <a:ln xmlns:a="http://schemas.openxmlformats.org/drawingml/2006/main" w="14288">
+            <a:solidFill>
+              <a:srgbClr val="A9D5F3"/>
+            </a:solidFill>
+            <a:prstDash val="solid"/>
+          </a:ln>
+        </p:spPr>
+      </p:sp>
+      <p:sp>
+        <p:nvSpPr>
+          <p:cNvPr id="7" name="PPAGENT_QA|parent=hierarchy-note-0|domains=hierarchy-note,hierarchy-content">
+            <a:extLst xmlns:a="http://schemas.openxmlformats.org/drawingml/2006/main">
+              <a:ext uri="{FF2B5EF4-FFF2-40B4-BE49-F238E27FC236}">
+                <a16:creationId xmlns:a16="http://schemas.microsoft.com/office/drawing/2014/main" id="{B3ADCE64-5A14-4B40-BE69-073CC99CA9A2}"/>
+              </a:ext>
+            </a:extLst>
+          </p:cNvPr>
+          <p:cNvSpPr>
+            <a:spLocks xmlns:a="http://schemas.openxmlformats.org/drawingml/2006/main" noGrp="1"/>
+          </p:cNvSpPr>
+          <p:nvPr/>
+        </p:nvSpPr>
+        <p:spPr>
+          <a:xfrm xmlns:a="http://schemas.openxmlformats.org/drawingml/2006/main">
+            <a:off x="6838950" y="1524000"/>
+            <a:ext cx="4629150" cy="995363"/>
+          </a:xfrm>
+          <a:prstGeom xmlns:a="http://schemas.openxmlformats.org/drawingml/2006/main" prst="roundRect">
+            <a:avLst>
+              <a:gd name="adj" fmla="val 11483"/>
+            </a:avLst>
+          </a:prstGeom>
+          <a:solidFill xmlns:a="http://schemas.openxmlformats.org/drawingml/2006/main">
+            <a:srgbClr val="FFFFFF"/>
+          </a:solidFill>
+          <a:ln xmlns:a="http://schemas.openxmlformats.org/drawingml/2006/main" w="9525">
+            <a:solidFill>
+              <a:srgbClr val="D8E5EF"/>
+            </a:solidFill>
+            <a:prstDash val="solid"/>
+          </a:ln>
+        </p:spPr>
+      </p:sp>
+      <p:sp>
+        <p:nvSpPr>
+          <p:cNvPr id="8" name="">
+            <a:extLst xmlns:a="http://schemas.openxmlformats.org/drawingml/2006/main">
+              <a:ext uri="{FF2B5EF4-FFF2-40B4-BE49-F238E27FC236}">
+                <a16:creationId xmlns:a16="http://schemas.microsoft.com/office/drawing/2014/main" id="{83ECFF1C-8131-476B-B707-4AB35FB6A094}"/>
+              </a:ext>
+            </a:extLst>
+          </p:cNvPr>
+          <p:cNvSpPr>
+            <a:spLocks xmlns:a="http://schemas.openxmlformats.org/drawingml/2006/main" noGrp="1"/>
+          </p:cNvSpPr>
+          <p:nvPr/>
+        </p:nvSpPr>
+        <p:spPr>
+          <a:xfrm xmlns:a="http://schemas.openxmlformats.org/drawingml/2006/main">
+            <a:off x="7048500" y="1859756"/>
+            <a:ext cx="381000" cy="381000"/>
+          </a:xfrm>
+          <a:prstGeom xmlns:a="http://schemas.openxmlformats.org/drawingml/2006/main" prst="ellipse">
+            <a:avLst/>
+          </a:prstGeom>
+          <a:solidFill xmlns:a="http://schemas.openxmlformats.org/drawingml/2006/main">
+            <a:srgbClr val="2AC7CE"/>
           </a:solidFill>
           <a:ln xmlns:a="http://schemas.openxmlformats.org/drawingml/2006/main" w="19050">
             <a:solidFill>
@@ -1207,7 +1428,193 @@
           <a:fontRef xmlns:a="http://schemas.openxmlformats.org/drawingml/2006/main" idx="major"/>
         </p:style>
         <p:txBody>
-          <a:bodyPr xmlns:a="http://schemas.openxmlformats.org/drawingml/2006/main" lIns="114300" tIns="76200" rIns="114300" bIns="76200" anchor="ctr">
+          <a:bodyPr xmlns:a="http://schemas.openxmlformats.org/drawingml/2006/main" lIns="0" tIns="0" rIns="0" bIns="0" anchor="ctr">
+            <a:normAutofit fontScale="100000"/>
+          </a:bodyPr>
+          <a:lstStyle xmlns:a="http://schemas.openxmlformats.org/drawingml/2006/main"/>
+          <a:p xmlns:a="http://schemas.openxmlformats.org/drawingml/2006/main">
+            <a:pPr algn="ctr">
+              <a:defRPr sz="1200" b="1">
+                <a:solidFill>
+                  <a:srgbClr val="FFFFFF"/>
+                </a:solidFill>
+                <a:latin typeface="Microsoft YaHei"/>
+                <a:ea typeface="Microsoft YaHei"/>
+                <a:cs typeface="Microsoft YaHei"/>
+              </a:defRPr>
+            </a:pPr>
+            <a:r>
+              <a:rPr sz="1200" b="1">
+                <a:solidFill>
+                  <a:srgbClr val="FFFFFF"/>
+                </a:solidFill>
+                <a:latin typeface="Microsoft YaHei"/>
+                <a:ea typeface="Microsoft YaHei"/>
+                <a:cs typeface="Microsoft YaHei"/>
+              </a:rPr>
+              <a:t>01</a:t>
+            </a:r>
+          </a:p>
+        </p:txBody>
+      </p:sp>
+      <p:sp>
+        <p:nvSpPr>
+          <p:cNvPr id="9" name="">
+            <a:extLst xmlns:a="http://schemas.openxmlformats.org/drawingml/2006/main">
+              <a:ext uri="{FF2B5EF4-FFF2-40B4-BE49-F238E27FC236}">
+                <a16:creationId xmlns:a16="http://schemas.microsoft.com/office/drawing/2014/main" id="{44F6CD40-E930-469E-AB2C-A757E78904C4}"/>
+              </a:ext>
+            </a:extLst>
+          </p:cNvPr>
+          <p:cNvSpPr>
+            <a:spLocks xmlns:a="http://schemas.openxmlformats.org/drawingml/2006/main" noGrp="1"/>
+          </p:cNvSpPr>
+          <p:nvPr/>
+        </p:nvSpPr>
+        <p:spPr>
+          <a:xfrm xmlns:a="http://schemas.openxmlformats.org/drawingml/2006/main">
+            <a:off x="7620000" y="1628775"/>
+            <a:ext cx="3562350" cy="785813"/>
+          </a:xfrm>
+          <a:prstGeom xmlns:a="http://schemas.openxmlformats.org/drawingml/2006/main" prst="rect">
+            <a:avLst/>
+          </a:prstGeom>
+          <a:noFill xmlns:a="http://schemas.openxmlformats.org/drawingml/2006/main"/>
+          <a:ln xmlns:a="http://schemas.openxmlformats.org/drawingml/2006/main" w="0">
+            <a:noFill/>
+            <a:prstDash val="solid"/>
+          </a:ln>
+        </p:spPr>
+        <p:txBody>
+          <a:bodyPr xmlns:a="http://schemas.openxmlformats.org/drawingml/2006/main" lIns="0" tIns="0" rIns="0" bIns="0" anchor="ctr">
+            <a:normAutofit fontScale="100000"/>
+          </a:bodyPr>
+          <a:lstStyle xmlns:a="http://schemas.openxmlformats.org/drawingml/2006/main"/>
+          <a:p xmlns:a="http://schemas.openxmlformats.org/drawingml/2006/main">
+            <a:pPr algn="l">
+              <a:defRPr sz="1200" b="0">
+                <a:solidFill>
+                  <a:srgbClr val="475569"/>
+                </a:solidFill>
+                <a:latin typeface="Microsoft YaHei"/>
+                <a:ea typeface="Microsoft YaHei"/>
+                <a:cs typeface="Microsoft YaHei"/>
+              </a:defRPr>
+            </a:pPr>
+            <a:r>
+              <a:rPr sz="1200" b="0">
+                <a:solidFill>
+                  <a:srgbClr val="475569"/>
+                </a:solidFill>
+                <a:latin typeface="Microsoft YaHei"/>
+                <a:ea typeface="Microsoft YaHei"/>
+                <a:cs typeface="Microsoft YaHei"/>
+              </a:rPr>
+              <a:t>明确要解决的问题、价值判断和长期边界</a:t>
+            </a:r>
+          </a:p>
+        </p:txBody>
+      </p:sp>
+      <p:sp>
+        <p:nvSpPr>
+          <p:cNvPr id="10" name="">
+            <a:extLst xmlns:a="http://schemas.openxmlformats.org/drawingml/2006/main">
+              <a:ext uri="{FF2B5EF4-FFF2-40B4-BE49-F238E27FC236}">
+                <a16:creationId xmlns:a16="http://schemas.microsoft.com/office/drawing/2014/main" id="{61AD03EA-2F0F-408C-A4B9-D55FDE3D5BE4}"/>
+              </a:ext>
+            </a:extLst>
+          </p:cNvPr>
+          <p:cNvSpPr>
+            <a:spLocks xmlns:a="http://schemas.openxmlformats.org/drawingml/2006/main" noGrp="1"/>
+          </p:cNvSpPr>
+          <p:nvPr/>
+        </p:nvSpPr>
+        <p:spPr>
+          <a:xfrm xmlns:a="http://schemas.openxmlformats.org/drawingml/2006/main">
+            <a:off x="4305300" y="2026444"/>
+            <a:ext cx="742950" cy="0"/>
+          </a:xfrm>
+          <a:prstGeom xmlns:a="http://schemas.openxmlformats.org/drawingml/2006/main" prst="line">
+            <a:avLst/>
+          </a:prstGeom>
+          <a:noFill xmlns:a="http://schemas.openxmlformats.org/drawingml/2006/main"/>
+          <a:ln xmlns:a="http://schemas.openxmlformats.org/drawingml/2006/main" w="11430">
+            <a:solidFill>
+              <a:srgbClr val="9DBBD3"/>
+            </a:solidFill>
+            <a:prstDash val="dash"/>
+          </a:ln>
+        </p:spPr>
+      </p:sp>
+      <p:sp>
+        <p:nvSpPr>
+          <p:cNvPr id="11" name="PPAGENT_QA|parent=hierarchy-level-1|domains=hierarchy-shape,hierarchy-content">
+            <a:extLst xmlns:a="http://schemas.openxmlformats.org/drawingml/2006/main">
+              <a:ext uri="{FF2B5EF4-FFF2-40B4-BE49-F238E27FC236}">
+                <a16:creationId xmlns:a16="http://schemas.microsoft.com/office/drawing/2014/main" id="{A3B034FE-4F1D-46C2-A1F9-16A4367C50C0}"/>
+              </a:ext>
+            </a:extLst>
+          </p:cNvPr>
+          <p:cNvSpPr>
+            <a:spLocks xmlns:a="http://schemas.openxmlformats.org/drawingml/2006/main" noGrp="1"/>
+          </p:cNvSpPr>
+          <p:nvPr/>
+        </p:nvSpPr>
+        <p:spPr>
+          <a:xfrm xmlns:a="http://schemas.openxmlformats.org/drawingml/2006/main">
+            <a:off x="1885950" y="2595563"/>
+            <a:ext cx="2895600" cy="1042988"/>
+          </a:xfrm>
+          <a:prstGeom xmlns:a="http://schemas.openxmlformats.org/drawingml/2006/main" prst="trapezoid">
+            <a:avLst/>
+          </a:prstGeom>
+          <a:solidFill xmlns:a="http://schemas.openxmlformats.org/drawingml/2006/main">
+            <a:srgbClr val="1BA7CE"/>
+          </a:solidFill>
+          <a:ln xmlns:a="http://schemas.openxmlformats.org/drawingml/2006/main" w="19050">
+            <a:solidFill>
+              <a:srgbClr val="FFFFFF"/>
+            </a:solidFill>
+            <a:prstDash val="solid"/>
+          </a:ln>
+        </p:spPr>
+        <p:style>
+          <a:lnRef xmlns:a="http://schemas.openxmlformats.org/drawingml/2006/main" idx="0"/>
+          <a:fillRef xmlns:a="http://schemas.openxmlformats.org/drawingml/2006/main" idx="0"/>
+          <a:effectRef xmlns:a="http://schemas.openxmlformats.org/drawingml/2006/main" idx="4"/>
+          <a:fontRef xmlns:a="http://schemas.openxmlformats.org/drawingml/2006/main" idx="major"/>
+        </p:style>
+      </p:sp>
+      <p:sp>
+        <p:nvSpPr>
+          <p:cNvPr id="12" name="">
+            <a:extLst xmlns:a="http://schemas.openxmlformats.org/drawingml/2006/main">
+              <a:ext uri="{FF2B5EF4-FFF2-40B4-BE49-F238E27FC236}">
+                <a16:creationId xmlns:a16="http://schemas.microsoft.com/office/drawing/2014/main" id="{A86A4DA6-CAC7-42FE-99EE-D170CF0F08C5}"/>
+              </a:ext>
+            </a:extLst>
+          </p:cNvPr>
+          <p:cNvSpPr>
+            <a:spLocks xmlns:a="http://schemas.openxmlformats.org/drawingml/2006/main" noGrp="1"/>
+          </p:cNvSpPr>
+          <p:nvPr/>
+        </p:nvSpPr>
+        <p:spPr>
+          <a:xfrm xmlns:a="http://schemas.openxmlformats.org/drawingml/2006/main">
+            <a:off x="2038350" y="2719388"/>
+            <a:ext cx="2590800" cy="285750"/>
+          </a:xfrm>
+          <a:prstGeom xmlns:a="http://schemas.openxmlformats.org/drawingml/2006/main" prst="rect">
+            <a:avLst/>
+          </a:prstGeom>
+          <a:noFill xmlns:a="http://schemas.openxmlformats.org/drawingml/2006/main"/>
+          <a:ln xmlns:a="http://schemas.openxmlformats.org/drawingml/2006/main" w="0">
+            <a:noFill/>
+            <a:prstDash val="solid"/>
+          </a:ln>
+        </p:spPr>
+        <p:txBody>
+          <a:bodyPr xmlns:a="http://schemas.openxmlformats.org/drawingml/2006/main" lIns="0" tIns="0" rIns="0" bIns="0" anchor="ctr">
             <a:normAutofit fontScale="100000"/>
           </a:bodyPr>
           <a:lstStyle xmlns:a="http://schemas.openxmlformats.org/drawingml/2006/main"/>
@@ -1231,78 +1638,49 @@
                 <a:ea typeface="Microsoft YaHei"/>
                 <a:cs typeface="Microsoft YaHei"/>
               </a:rPr>
-              <a:t>核心层</a:t>
-            </a:r>
-          </a:p>
-          <a:p xmlns:a="http://schemas.openxmlformats.org/drawingml/2006/main">
-            <a:pPr algn="ctr">
-              <a:defRPr sz="1500" b="1">
-                <a:solidFill>
-                  <a:srgbClr val="FFFFFF"/>
-                </a:solidFill>
-                <a:latin typeface="Microsoft YaHei"/>
-                <a:ea typeface="Microsoft YaHei"/>
-                <a:cs typeface="Microsoft YaHei"/>
-              </a:defRPr>
-            </a:pPr>
-            <a:r>
-              <a:rPr sz="1500" b="1">
-                <a:solidFill>
-                  <a:srgbClr val="FFFFFF"/>
-                </a:solidFill>
-                <a:latin typeface="Microsoft YaHei"/>
-                <a:ea typeface="Microsoft YaHei"/>
-                <a:cs typeface="Microsoft YaHei"/>
-              </a:rPr>
-              <a:t>10%</a:t>
+              <a:t>规则层</a:t>
             </a:r>
           </a:p>
         </p:txBody>
       </p:sp>
       <p:sp>
         <p:nvSpPr>
-          <p:cNvPr id="4" name="">
-            <a:extLst xmlns:a="http://schemas.openxmlformats.org/drawingml/2006/main">
-              <a:ext uri="{FF2B5EF4-FFF2-40B4-BE49-F238E27FC236}">
-                <a16:creationId xmlns:a16="http://schemas.microsoft.com/office/drawing/2014/main" id="{66F36432-E41C-4110-88F9-2ED58AC48CBC}"/>
-              </a:ext>
-            </a:extLst>
-          </p:cNvPr>
-          <p:cNvSpPr>
-            <a:spLocks xmlns:a="http://schemas.openxmlformats.org/drawingml/2006/main" noGrp="1"/>
-          </p:cNvSpPr>
-          <p:nvPr/>
-        </p:nvSpPr>
-        <p:spPr>
-          <a:xfrm xmlns:a="http://schemas.openxmlformats.org/drawingml/2006/main">
-            <a:off x="7048500" y="1562100"/>
-            <a:ext cx="4095750" cy="762000"/>
-          </a:xfrm>
-          <a:prstGeom xmlns:a="http://schemas.openxmlformats.org/drawingml/2006/main" prst="roundRect">
-            <a:avLst>
-              <a:gd name="adj" fmla="val 15000"/>
-            </a:avLst>
-          </a:prstGeom>
-          <a:solidFill xmlns:a="http://schemas.openxmlformats.org/drawingml/2006/main">
-            <a:srgbClr val="FFFFFF"/>
-          </a:solidFill>
-          <a:ln xmlns:a="http://schemas.openxmlformats.org/drawingml/2006/main" w="9525">
-            <a:solidFill>
-              <a:srgbClr val="C9D5E3"/>
-            </a:solidFill>
-            <a:prstDash val="dash"/>
+          <p:cNvPr id="13" name="">
+            <a:extLst xmlns:a="http://schemas.openxmlformats.org/drawingml/2006/main">
+              <a:ext uri="{FF2B5EF4-FFF2-40B4-BE49-F238E27FC236}">
+                <a16:creationId xmlns:a16="http://schemas.microsoft.com/office/drawing/2014/main" id="{C7FCB618-361B-4F5D-8D87-4ACAFD3E9EC6}"/>
+              </a:ext>
+            </a:extLst>
+          </p:cNvPr>
+          <p:cNvSpPr>
+            <a:spLocks xmlns:a="http://schemas.openxmlformats.org/drawingml/2006/main" noGrp="1"/>
+          </p:cNvSpPr>
+          <p:nvPr/>
+        </p:nvSpPr>
+        <p:spPr>
+          <a:xfrm xmlns:a="http://schemas.openxmlformats.org/drawingml/2006/main">
+            <a:off x="2038350" y="3005138"/>
+            <a:ext cx="2590800" cy="238125"/>
+          </a:xfrm>
+          <a:prstGeom xmlns:a="http://schemas.openxmlformats.org/drawingml/2006/main" prst="rect">
+            <a:avLst/>
+          </a:prstGeom>
+          <a:noFill xmlns:a="http://schemas.openxmlformats.org/drawingml/2006/main"/>
+          <a:ln xmlns:a="http://schemas.openxmlformats.org/drawingml/2006/main" w="0">
+            <a:noFill/>
+            <a:prstDash val="solid"/>
           </a:ln>
         </p:spPr>
         <p:txBody>
-          <a:bodyPr xmlns:a="http://schemas.openxmlformats.org/drawingml/2006/main" lIns="114300" tIns="76200" rIns="114300" bIns="76200" anchor="ctr">
+          <a:bodyPr xmlns:a="http://schemas.openxmlformats.org/drawingml/2006/main" lIns="0" tIns="0" rIns="0" bIns="0" anchor="ctr">
             <a:normAutofit fontScale="100000"/>
           </a:bodyPr>
           <a:lstStyle xmlns:a="http://schemas.openxmlformats.org/drawingml/2006/main"/>
           <a:p xmlns:a="http://schemas.openxmlformats.org/drawingml/2006/main">
-            <a:pPr algn="l">
-              <a:defRPr sz="1275" b="0">
-                <a:solidFill>
-                  <a:srgbClr val="475569"/>
+            <a:pPr algn="ctr">
+              <a:defRPr sz="1350" b="1">
+                <a:solidFill>
+                  <a:srgbClr val="DFF9FB"/>
                 </a:solidFill>
                 <a:latin typeface="Microsoft YaHei"/>
                 <a:ea typeface="Microsoft YaHei"/>
@@ -1310,43 +1688,109 @@
               </a:defRPr>
             </a:pPr>
             <a:r>
-              <a:rPr sz="1275" b="0">
-                <a:solidFill>
-                  <a:srgbClr val="475569"/>
+              <a:rPr sz="1350" b="1">
+                <a:solidFill>
+                  <a:srgbClr val="DFF9FB"/>
                 </a:solidFill>
                 <a:latin typeface="Microsoft YaHei"/>
                 <a:ea typeface="Microsoft YaHei"/>
                 <a:cs typeface="Microsoft YaHei"/>
               </a:rPr>
-              <a:t>负责定义方向与核心策略</a:t>
+              <a:t>HOW</a:t>
             </a:r>
           </a:p>
         </p:txBody>
       </p:sp>
       <p:sp>
         <p:nvSpPr>
-          <p:cNvPr id="5" name="">
-            <a:extLst xmlns:a="http://schemas.openxmlformats.org/drawingml/2006/main">
-              <a:ext uri="{FF2B5EF4-FFF2-40B4-BE49-F238E27FC236}">
-                <a16:creationId xmlns:a16="http://schemas.microsoft.com/office/drawing/2014/main" id="{01C56459-4C6E-4244-BE72-19670483AEE6}"/>
-              </a:ext>
-            </a:extLst>
-          </p:cNvPr>
-          <p:cNvSpPr>
-            <a:spLocks xmlns:a="http://schemas.openxmlformats.org/drawingml/2006/main" noGrp="1"/>
-          </p:cNvSpPr>
-          <p:nvPr/>
-        </p:nvSpPr>
-        <p:spPr>
-          <a:xfrm xmlns:a="http://schemas.openxmlformats.org/drawingml/2006/main">
-            <a:off x="2000250" y="2590800"/>
-            <a:ext cx="3143250" cy="1047750"/>
-          </a:xfrm>
-          <a:prstGeom xmlns:a="http://schemas.openxmlformats.org/drawingml/2006/main" prst="trapezoid">
-            <a:avLst/>
+          <p:cNvPr id="14" name="">
+            <a:extLst xmlns:a="http://schemas.openxmlformats.org/drawingml/2006/main">
+              <a:ext uri="{FF2B5EF4-FFF2-40B4-BE49-F238E27FC236}">
+                <a16:creationId xmlns:a16="http://schemas.microsoft.com/office/drawing/2014/main" id="{BE79627F-EC7D-4441-9F2D-5CEEDE6F8969}"/>
+              </a:ext>
+            </a:extLst>
+          </p:cNvPr>
+          <p:cNvSpPr>
+            <a:spLocks xmlns:a="http://schemas.openxmlformats.org/drawingml/2006/main" noGrp="1"/>
+          </p:cNvSpPr>
+          <p:nvPr/>
+        </p:nvSpPr>
+        <p:spPr>
+          <a:xfrm xmlns:a="http://schemas.openxmlformats.org/drawingml/2006/main">
+            <a:off x="1714500" y="3543300"/>
+            <a:ext cx="3238500" cy="266700"/>
+          </a:xfrm>
+          <a:prstGeom xmlns:a="http://schemas.openxmlformats.org/drawingml/2006/main" prst="ellipse">
+            <a:avLst/>
+          </a:prstGeom>
+          <a:noFill xmlns:a="http://schemas.openxmlformats.org/drawingml/2006/main"/>
+          <a:ln xmlns:a="http://schemas.openxmlformats.org/drawingml/2006/main" w="14288">
+            <a:solidFill>
+              <a:srgbClr val="A9D5F3"/>
+            </a:solidFill>
+            <a:prstDash val="solid"/>
+          </a:ln>
+        </p:spPr>
+      </p:sp>
+      <p:sp>
+        <p:nvSpPr>
+          <p:cNvPr id="15" name="PPAGENT_QA|parent=hierarchy-note-1|domains=hierarchy-note,hierarchy-content">
+            <a:extLst xmlns:a="http://schemas.openxmlformats.org/drawingml/2006/main">
+              <a:ext uri="{FF2B5EF4-FFF2-40B4-BE49-F238E27FC236}">
+                <a16:creationId xmlns:a16="http://schemas.microsoft.com/office/drawing/2014/main" id="{5783153E-1D46-40BC-98CC-257AFC3E00DF}"/>
+              </a:ext>
+            </a:extLst>
+          </p:cNvPr>
+          <p:cNvSpPr>
+            <a:spLocks xmlns:a="http://schemas.openxmlformats.org/drawingml/2006/main" noGrp="1"/>
+          </p:cNvSpPr>
+          <p:nvPr/>
+        </p:nvSpPr>
+        <p:spPr>
+          <a:xfrm xmlns:a="http://schemas.openxmlformats.org/drawingml/2006/main">
+            <a:off x="6838950" y="2614613"/>
+            <a:ext cx="4629150" cy="995363"/>
+          </a:xfrm>
+          <a:prstGeom xmlns:a="http://schemas.openxmlformats.org/drawingml/2006/main" prst="roundRect">
+            <a:avLst>
+              <a:gd name="adj" fmla="val 11483"/>
+            </a:avLst>
           </a:prstGeom>
           <a:solidFill xmlns:a="http://schemas.openxmlformats.org/drawingml/2006/main">
-            <a:srgbClr val="00A8D8"/>
+            <a:srgbClr val="F2F7FB"/>
+          </a:solidFill>
+          <a:ln xmlns:a="http://schemas.openxmlformats.org/drawingml/2006/main" w="9525">
+            <a:solidFill>
+              <a:srgbClr val="D8E5EF"/>
+            </a:solidFill>
+            <a:prstDash val="solid"/>
+          </a:ln>
+        </p:spPr>
+      </p:sp>
+      <p:sp>
+        <p:nvSpPr>
+          <p:cNvPr id="16" name="">
+            <a:extLst xmlns:a="http://schemas.openxmlformats.org/drawingml/2006/main">
+              <a:ext uri="{FF2B5EF4-FFF2-40B4-BE49-F238E27FC236}">
+                <a16:creationId xmlns:a16="http://schemas.microsoft.com/office/drawing/2014/main" id="{E4D9CC06-84E8-49A3-8FE5-D98F348EBF2C}"/>
+              </a:ext>
+            </a:extLst>
+          </p:cNvPr>
+          <p:cNvSpPr>
+            <a:spLocks xmlns:a="http://schemas.openxmlformats.org/drawingml/2006/main" noGrp="1"/>
+          </p:cNvSpPr>
+          <p:nvPr/>
+        </p:nvSpPr>
+        <p:spPr>
+          <a:xfrm xmlns:a="http://schemas.openxmlformats.org/drawingml/2006/main">
+            <a:off x="7048500" y="2950369"/>
+            <a:ext cx="381000" cy="381000"/>
+          </a:xfrm>
+          <a:prstGeom xmlns:a="http://schemas.openxmlformats.org/drawingml/2006/main" prst="ellipse">
+            <a:avLst/>
+          </a:prstGeom>
+          <a:solidFill xmlns:a="http://schemas.openxmlformats.org/drawingml/2006/main">
+            <a:srgbClr val="1BA7CE"/>
           </a:solidFill>
           <a:ln xmlns:a="http://schemas.openxmlformats.org/drawingml/2006/main" w="19050">
             <a:solidFill>
@@ -1362,7 +1806,193 @@
           <a:fontRef xmlns:a="http://schemas.openxmlformats.org/drawingml/2006/main" idx="major"/>
         </p:style>
         <p:txBody>
-          <a:bodyPr xmlns:a="http://schemas.openxmlformats.org/drawingml/2006/main" lIns="114300" tIns="76200" rIns="114300" bIns="76200" anchor="ctr">
+          <a:bodyPr xmlns:a="http://schemas.openxmlformats.org/drawingml/2006/main" lIns="0" tIns="0" rIns="0" bIns="0" anchor="ctr">
+            <a:normAutofit fontScale="100000"/>
+          </a:bodyPr>
+          <a:lstStyle xmlns:a="http://schemas.openxmlformats.org/drawingml/2006/main"/>
+          <a:p xmlns:a="http://schemas.openxmlformats.org/drawingml/2006/main">
+            <a:pPr algn="ctr">
+              <a:defRPr sz="1200" b="1">
+                <a:solidFill>
+                  <a:srgbClr val="FFFFFF"/>
+                </a:solidFill>
+                <a:latin typeface="Microsoft YaHei"/>
+                <a:ea typeface="Microsoft YaHei"/>
+                <a:cs typeface="Microsoft YaHei"/>
+              </a:defRPr>
+            </a:pPr>
+            <a:r>
+              <a:rPr sz="1200" b="1">
+                <a:solidFill>
+                  <a:srgbClr val="FFFFFF"/>
+                </a:solidFill>
+                <a:latin typeface="Microsoft YaHei"/>
+                <a:ea typeface="Microsoft YaHei"/>
+                <a:cs typeface="Microsoft YaHei"/>
+              </a:rPr>
+              <a:t>02</a:t>
+            </a:r>
+          </a:p>
+        </p:txBody>
+      </p:sp>
+      <p:sp>
+        <p:nvSpPr>
+          <p:cNvPr id="17" name="">
+            <a:extLst xmlns:a="http://schemas.openxmlformats.org/drawingml/2006/main">
+              <a:ext uri="{FF2B5EF4-FFF2-40B4-BE49-F238E27FC236}">
+                <a16:creationId xmlns:a16="http://schemas.microsoft.com/office/drawing/2014/main" id="{BD7692AC-9138-451B-9E63-D595AAE35C2F}"/>
+              </a:ext>
+            </a:extLst>
+          </p:cNvPr>
+          <p:cNvSpPr>
+            <a:spLocks xmlns:a="http://schemas.openxmlformats.org/drawingml/2006/main" noGrp="1"/>
+          </p:cNvSpPr>
+          <p:nvPr/>
+        </p:nvSpPr>
+        <p:spPr>
+          <a:xfrm xmlns:a="http://schemas.openxmlformats.org/drawingml/2006/main">
+            <a:off x="7620000" y="2719388"/>
+            <a:ext cx="3562350" cy="785813"/>
+          </a:xfrm>
+          <a:prstGeom xmlns:a="http://schemas.openxmlformats.org/drawingml/2006/main" prst="rect">
+            <a:avLst/>
+          </a:prstGeom>
+          <a:noFill xmlns:a="http://schemas.openxmlformats.org/drawingml/2006/main"/>
+          <a:ln xmlns:a="http://schemas.openxmlformats.org/drawingml/2006/main" w="0">
+            <a:noFill/>
+            <a:prstDash val="solid"/>
+          </a:ln>
+        </p:spPr>
+        <p:txBody>
+          <a:bodyPr xmlns:a="http://schemas.openxmlformats.org/drawingml/2006/main" lIns="0" tIns="0" rIns="0" bIns="0" anchor="ctr">
+            <a:normAutofit fontScale="100000"/>
+          </a:bodyPr>
+          <a:lstStyle xmlns:a="http://schemas.openxmlformats.org/drawingml/2006/main"/>
+          <a:p xmlns:a="http://schemas.openxmlformats.org/drawingml/2006/main">
+            <a:pPr algn="l">
+              <a:defRPr sz="1200" b="0">
+                <a:solidFill>
+                  <a:srgbClr val="475569"/>
+                </a:solidFill>
+                <a:latin typeface="Microsoft YaHei"/>
+                <a:ea typeface="Microsoft YaHei"/>
+                <a:cs typeface="Microsoft YaHei"/>
+              </a:defRPr>
+            </a:pPr>
+            <a:r>
+              <a:rPr sz="1200" b="0">
+                <a:solidFill>
+                  <a:srgbClr val="475569"/>
+                </a:solidFill>
+                <a:latin typeface="Microsoft YaHei"/>
+                <a:ea typeface="Microsoft YaHei"/>
+                <a:cs typeface="Microsoft YaHei"/>
+              </a:rPr>
+              <a:t>把经验变成可选择、可验证的工作规则</a:t>
+            </a:r>
+          </a:p>
+        </p:txBody>
+      </p:sp>
+      <p:sp>
+        <p:nvSpPr>
+          <p:cNvPr id="18" name="">
+            <a:extLst xmlns:a="http://schemas.openxmlformats.org/drawingml/2006/main">
+              <a:ext uri="{FF2B5EF4-FFF2-40B4-BE49-F238E27FC236}">
+                <a16:creationId xmlns:a16="http://schemas.microsoft.com/office/drawing/2014/main" id="{FE00F9F2-01A4-40B2-8F2C-32E8A3245CC1}"/>
+              </a:ext>
+            </a:extLst>
+          </p:cNvPr>
+          <p:cNvSpPr>
+            <a:spLocks xmlns:a="http://schemas.openxmlformats.org/drawingml/2006/main" noGrp="1"/>
+          </p:cNvSpPr>
+          <p:nvPr/>
+        </p:nvSpPr>
+        <p:spPr>
+          <a:xfrm xmlns:a="http://schemas.openxmlformats.org/drawingml/2006/main">
+            <a:off x="4895850" y="3117056"/>
+            <a:ext cx="742950" cy="0"/>
+          </a:xfrm>
+          <a:prstGeom xmlns:a="http://schemas.openxmlformats.org/drawingml/2006/main" prst="line">
+            <a:avLst/>
+          </a:prstGeom>
+          <a:noFill xmlns:a="http://schemas.openxmlformats.org/drawingml/2006/main"/>
+          <a:ln xmlns:a="http://schemas.openxmlformats.org/drawingml/2006/main" w="11430">
+            <a:solidFill>
+              <a:srgbClr val="9DBBD3"/>
+            </a:solidFill>
+            <a:prstDash val="dash"/>
+          </a:ln>
+        </p:spPr>
+      </p:sp>
+      <p:sp>
+        <p:nvSpPr>
+          <p:cNvPr id="19" name="PPAGENT_QA|parent=hierarchy-level-2|domains=hierarchy-shape,hierarchy-content">
+            <a:extLst xmlns:a="http://schemas.openxmlformats.org/drawingml/2006/main">
+              <a:ext uri="{FF2B5EF4-FFF2-40B4-BE49-F238E27FC236}">
+                <a16:creationId xmlns:a16="http://schemas.microsoft.com/office/drawing/2014/main" id="{E257C84D-7A7B-44D1-8691-41FB2D0B9BDB}"/>
+              </a:ext>
+            </a:extLst>
+          </p:cNvPr>
+          <p:cNvSpPr>
+            <a:spLocks xmlns:a="http://schemas.openxmlformats.org/drawingml/2006/main" noGrp="1"/>
+          </p:cNvSpPr>
+          <p:nvPr/>
+        </p:nvSpPr>
+        <p:spPr>
+          <a:xfrm xmlns:a="http://schemas.openxmlformats.org/drawingml/2006/main">
+            <a:off x="1295400" y="3686175"/>
+            <a:ext cx="4076700" cy="1042988"/>
+          </a:xfrm>
+          <a:prstGeom xmlns:a="http://schemas.openxmlformats.org/drawingml/2006/main" prst="trapezoid">
+            <a:avLst/>
+          </a:prstGeom>
+          <a:solidFill xmlns:a="http://schemas.openxmlformats.org/drawingml/2006/main">
+            <a:srgbClr val="187FC3"/>
+          </a:solidFill>
+          <a:ln xmlns:a="http://schemas.openxmlformats.org/drawingml/2006/main" w="19050">
+            <a:solidFill>
+              <a:srgbClr val="FFFFFF"/>
+            </a:solidFill>
+            <a:prstDash val="solid"/>
+          </a:ln>
+        </p:spPr>
+        <p:style>
+          <a:lnRef xmlns:a="http://schemas.openxmlformats.org/drawingml/2006/main" idx="0"/>
+          <a:fillRef xmlns:a="http://schemas.openxmlformats.org/drawingml/2006/main" idx="0"/>
+          <a:effectRef xmlns:a="http://schemas.openxmlformats.org/drawingml/2006/main" idx="4"/>
+          <a:fontRef xmlns:a="http://schemas.openxmlformats.org/drawingml/2006/main" idx="major"/>
+        </p:style>
+      </p:sp>
+      <p:sp>
+        <p:nvSpPr>
+          <p:cNvPr id="20" name="">
+            <a:extLst xmlns:a="http://schemas.openxmlformats.org/drawingml/2006/main">
+              <a:ext uri="{FF2B5EF4-FFF2-40B4-BE49-F238E27FC236}">
+                <a16:creationId xmlns:a16="http://schemas.microsoft.com/office/drawing/2014/main" id="{C0417DF4-C298-4209-B4E7-351923F23BCF}"/>
+              </a:ext>
+            </a:extLst>
+          </p:cNvPr>
+          <p:cNvSpPr>
+            <a:spLocks xmlns:a="http://schemas.openxmlformats.org/drawingml/2006/main" noGrp="1"/>
+          </p:cNvSpPr>
+          <p:nvPr/>
+        </p:nvSpPr>
+        <p:spPr>
+          <a:xfrm xmlns:a="http://schemas.openxmlformats.org/drawingml/2006/main">
+            <a:off x="1447800" y="3810000"/>
+            <a:ext cx="3771900" cy="285750"/>
+          </a:xfrm>
+          <a:prstGeom xmlns:a="http://schemas.openxmlformats.org/drawingml/2006/main" prst="rect">
+            <a:avLst/>
+          </a:prstGeom>
+          <a:noFill xmlns:a="http://schemas.openxmlformats.org/drawingml/2006/main"/>
+          <a:ln xmlns:a="http://schemas.openxmlformats.org/drawingml/2006/main" w="0">
+            <a:noFill/>
+            <a:prstDash val="solid"/>
+          </a:ln>
+        </p:spPr>
+        <p:txBody>
+          <a:bodyPr xmlns:a="http://schemas.openxmlformats.org/drawingml/2006/main" lIns="0" tIns="0" rIns="0" bIns="0" anchor="ctr">
             <a:normAutofit fontScale="100000"/>
           </a:bodyPr>
           <a:lstStyle xmlns:a="http://schemas.openxmlformats.org/drawingml/2006/main"/>
@@ -1386,78 +2016,49 @@
                 <a:ea typeface="Microsoft YaHei"/>
                 <a:cs typeface="Microsoft YaHei"/>
               </a:rPr>
-              <a:t>关键层</a:t>
-            </a:r>
-          </a:p>
-          <a:p xmlns:a="http://schemas.openxmlformats.org/drawingml/2006/main">
-            <a:pPr algn="ctr">
-              <a:defRPr sz="1500" b="1">
-                <a:solidFill>
-                  <a:srgbClr val="FFFFFF"/>
-                </a:solidFill>
-                <a:latin typeface="Microsoft YaHei"/>
-                <a:ea typeface="Microsoft YaHei"/>
-                <a:cs typeface="Microsoft YaHei"/>
-              </a:defRPr>
-            </a:pPr>
-            <a:r>
-              <a:rPr sz="1500" b="1">
-                <a:solidFill>
-                  <a:srgbClr val="FFFFFF"/>
-                </a:solidFill>
-                <a:latin typeface="Microsoft YaHei"/>
-                <a:ea typeface="Microsoft YaHei"/>
-                <a:cs typeface="Microsoft YaHei"/>
-              </a:rPr>
-              <a:t>20%</a:t>
+              <a:t>能力层</a:t>
             </a:r>
           </a:p>
         </p:txBody>
       </p:sp>
       <p:sp>
         <p:nvSpPr>
-          <p:cNvPr id="6" name="">
-            <a:extLst xmlns:a="http://schemas.openxmlformats.org/drawingml/2006/main">
-              <a:ext uri="{FF2B5EF4-FFF2-40B4-BE49-F238E27FC236}">
-                <a16:creationId xmlns:a16="http://schemas.microsoft.com/office/drawing/2014/main" id="{C716A41B-E100-4E56-860F-0E1150F44CB2}"/>
-              </a:ext>
-            </a:extLst>
-          </p:cNvPr>
-          <p:cNvSpPr>
-            <a:spLocks xmlns:a="http://schemas.openxmlformats.org/drawingml/2006/main" noGrp="1"/>
-          </p:cNvSpPr>
-          <p:nvPr/>
-        </p:nvSpPr>
-        <p:spPr>
-          <a:xfrm xmlns:a="http://schemas.openxmlformats.org/drawingml/2006/main">
-            <a:off x="7048500" y="2724150"/>
-            <a:ext cx="4095750" cy="762000"/>
-          </a:xfrm>
-          <a:prstGeom xmlns:a="http://schemas.openxmlformats.org/drawingml/2006/main" prst="roundRect">
-            <a:avLst>
-              <a:gd name="adj" fmla="val 15000"/>
-            </a:avLst>
-          </a:prstGeom>
-          <a:solidFill xmlns:a="http://schemas.openxmlformats.org/drawingml/2006/main">
-            <a:srgbClr val="FFFFFF"/>
-          </a:solidFill>
-          <a:ln xmlns:a="http://schemas.openxmlformats.org/drawingml/2006/main" w="9525">
-            <a:solidFill>
-              <a:srgbClr val="C9D5E3"/>
-            </a:solidFill>
-            <a:prstDash val="dash"/>
+          <p:cNvPr id="21" name="">
+            <a:extLst xmlns:a="http://schemas.openxmlformats.org/drawingml/2006/main">
+              <a:ext uri="{FF2B5EF4-FFF2-40B4-BE49-F238E27FC236}">
+                <a16:creationId xmlns:a16="http://schemas.microsoft.com/office/drawing/2014/main" id="{D4B0A5DE-D51E-4A29-BE96-78D307DC546E}"/>
+              </a:ext>
+            </a:extLst>
+          </p:cNvPr>
+          <p:cNvSpPr>
+            <a:spLocks xmlns:a="http://schemas.openxmlformats.org/drawingml/2006/main" noGrp="1"/>
+          </p:cNvSpPr>
+          <p:nvPr/>
+        </p:nvSpPr>
+        <p:spPr>
+          <a:xfrm xmlns:a="http://schemas.openxmlformats.org/drawingml/2006/main">
+            <a:off x="1447800" y="4095750"/>
+            <a:ext cx="3771900" cy="238125"/>
+          </a:xfrm>
+          <a:prstGeom xmlns:a="http://schemas.openxmlformats.org/drawingml/2006/main" prst="rect">
+            <a:avLst/>
+          </a:prstGeom>
+          <a:noFill xmlns:a="http://schemas.openxmlformats.org/drawingml/2006/main"/>
+          <a:ln xmlns:a="http://schemas.openxmlformats.org/drawingml/2006/main" w="0">
+            <a:noFill/>
+            <a:prstDash val="solid"/>
           </a:ln>
         </p:spPr>
         <p:txBody>
-          <a:bodyPr xmlns:a="http://schemas.openxmlformats.org/drawingml/2006/main" lIns="114300" tIns="76200" rIns="114300" bIns="76200" anchor="ctr">
+          <a:bodyPr xmlns:a="http://schemas.openxmlformats.org/drawingml/2006/main" lIns="0" tIns="0" rIns="0" bIns="0" anchor="ctr">
             <a:normAutofit fontScale="100000"/>
           </a:bodyPr>
           <a:lstStyle xmlns:a="http://schemas.openxmlformats.org/drawingml/2006/main"/>
           <a:p xmlns:a="http://schemas.openxmlformats.org/drawingml/2006/main">
-            <a:pPr algn="l">
-              <a:defRPr sz="1275" b="0">
-                <a:solidFill>
-                  <a:srgbClr val="475569"/>
+            <a:pPr algn="ctr">
+              <a:defRPr sz="1350" b="1">
+                <a:solidFill>
+                  <a:srgbClr val="DFF9FB"/>
                 </a:solidFill>
                 <a:latin typeface="Microsoft YaHei"/>
                 <a:ea typeface="Microsoft YaHei"/>
@@ -1465,43 +2066,109 @@
               </a:defRPr>
             </a:pPr>
             <a:r>
-              <a:rPr sz="1275" b="0">
-                <a:solidFill>
-                  <a:srgbClr val="475569"/>
+              <a:rPr sz="1350" b="1">
+                <a:solidFill>
+                  <a:srgbClr val="DFF9FB"/>
                 </a:solidFill>
                 <a:latin typeface="Microsoft YaHei"/>
                 <a:ea typeface="Microsoft YaHei"/>
                 <a:cs typeface="Microsoft YaHei"/>
               </a:rPr>
-              <a:t>负责关键任务与资源配置</a:t>
+              <a:t>WHAT</a:t>
             </a:r>
           </a:p>
         </p:txBody>
       </p:sp>
       <p:sp>
         <p:nvSpPr>
-          <p:cNvPr id="7" name="">
-            <a:extLst xmlns:a="http://schemas.openxmlformats.org/drawingml/2006/main">
-              <a:ext uri="{FF2B5EF4-FFF2-40B4-BE49-F238E27FC236}">
-                <a16:creationId xmlns:a16="http://schemas.microsoft.com/office/drawing/2014/main" id="{BD2EFC9F-7B56-4440-977E-95DC923EFB7C}"/>
-              </a:ext>
-            </a:extLst>
-          </p:cNvPr>
-          <p:cNvSpPr>
-            <a:spLocks xmlns:a="http://schemas.openxmlformats.org/drawingml/2006/main" noGrp="1"/>
-          </p:cNvSpPr>
-          <p:nvPr/>
-        </p:nvSpPr>
-        <p:spPr>
-          <a:xfrm xmlns:a="http://schemas.openxmlformats.org/drawingml/2006/main">
-            <a:off x="1428750" y="3752850"/>
-            <a:ext cx="4286250" cy="1047750"/>
-          </a:xfrm>
-          <a:prstGeom xmlns:a="http://schemas.openxmlformats.org/drawingml/2006/main" prst="trapezoid">
-            <a:avLst/>
+          <p:cNvPr id="22" name="">
+            <a:extLst xmlns:a="http://schemas.openxmlformats.org/drawingml/2006/main">
+              <a:ext uri="{FF2B5EF4-FFF2-40B4-BE49-F238E27FC236}">
+                <a16:creationId xmlns:a16="http://schemas.microsoft.com/office/drawing/2014/main" id="{E35B6860-8A3F-48F8-A879-FCC772C66D52}"/>
+              </a:ext>
+            </a:extLst>
+          </p:cNvPr>
+          <p:cNvSpPr>
+            <a:spLocks xmlns:a="http://schemas.openxmlformats.org/drawingml/2006/main" noGrp="1"/>
+          </p:cNvSpPr>
+          <p:nvPr/>
+        </p:nvSpPr>
+        <p:spPr>
+          <a:xfrm xmlns:a="http://schemas.openxmlformats.org/drawingml/2006/main">
+            <a:off x="1123950" y="4633913"/>
+            <a:ext cx="4419600" cy="266700"/>
+          </a:xfrm>
+          <a:prstGeom xmlns:a="http://schemas.openxmlformats.org/drawingml/2006/main" prst="ellipse">
+            <a:avLst/>
+          </a:prstGeom>
+          <a:noFill xmlns:a="http://schemas.openxmlformats.org/drawingml/2006/main"/>
+          <a:ln xmlns:a="http://schemas.openxmlformats.org/drawingml/2006/main" w="14288">
+            <a:solidFill>
+              <a:srgbClr val="A9D5F3"/>
+            </a:solidFill>
+            <a:prstDash val="solid"/>
+          </a:ln>
+        </p:spPr>
+      </p:sp>
+      <p:sp>
+        <p:nvSpPr>
+          <p:cNvPr id="23" name="PPAGENT_QA|parent=hierarchy-note-2|domains=hierarchy-note,hierarchy-content">
+            <a:extLst xmlns:a="http://schemas.openxmlformats.org/drawingml/2006/main">
+              <a:ext uri="{FF2B5EF4-FFF2-40B4-BE49-F238E27FC236}">
+                <a16:creationId xmlns:a16="http://schemas.microsoft.com/office/drawing/2014/main" id="{1533C4A5-10D0-4B83-9C30-A183598F2A31}"/>
+              </a:ext>
+            </a:extLst>
+          </p:cNvPr>
+          <p:cNvSpPr>
+            <a:spLocks xmlns:a="http://schemas.openxmlformats.org/drawingml/2006/main" noGrp="1"/>
+          </p:cNvSpPr>
+          <p:nvPr/>
+        </p:nvSpPr>
+        <p:spPr>
+          <a:xfrm xmlns:a="http://schemas.openxmlformats.org/drawingml/2006/main">
+            <a:off x="6838950" y="3705225"/>
+            <a:ext cx="4629150" cy="995363"/>
+          </a:xfrm>
+          <a:prstGeom xmlns:a="http://schemas.openxmlformats.org/drawingml/2006/main" prst="roundRect">
+            <a:avLst>
+              <a:gd name="adj" fmla="val 11483"/>
+            </a:avLst>
           </a:prstGeom>
           <a:solidFill xmlns:a="http://schemas.openxmlformats.org/drawingml/2006/main">
-            <a:srgbClr val="1677C8"/>
+            <a:srgbClr val="FFFFFF"/>
+          </a:solidFill>
+          <a:ln xmlns:a="http://schemas.openxmlformats.org/drawingml/2006/main" w="9525">
+            <a:solidFill>
+              <a:srgbClr val="D8E5EF"/>
+            </a:solidFill>
+            <a:prstDash val="solid"/>
+          </a:ln>
+        </p:spPr>
+      </p:sp>
+      <p:sp>
+        <p:nvSpPr>
+          <p:cNvPr id="24" name="">
+            <a:extLst xmlns:a="http://schemas.openxmlformats.org/drawingml/2006/main">
+              <a:ext uri="{FF2B5EF4-FFF2-40B4-BE49-F238E27FC236}">
+                <a16:creationId xmlns:a16="http://schemas.microsoft.com/office/drawing/2014/main" id="{1A7B1469-633B-4C80-B734-FD95B661A64A}"/>
+              </a:ext>
+            </a:extLst>
+          </p:cNvPr>
+          <p:cNvSpPr>
+            <a:spLocks xmlns:a="http://schemas.openxmlformats.org/drawingml/2006/main" noGrp="1"/>
+          </p:cNvSpPr>
+          <p:nvPr/>
+        </p:nvSpPr>
+        <p:spPr>
+          <a:xfrm xmlns:a="http://schemas.openxmlformats.org/drawingml/2006/main">
+            <a:off x="7048500" y="4040981"/>
+            <a:ext cx="381000" cy="381000"/>
+          </a:xfrm>
+          <a:prstGeom xmlns:a="http://schemas.openxmlformats.org/drawingml/2006/main" prst="ellipse">
+            <a:avLst/>
+          </a:prstGeom>
+          <a:solidFill xmlns:a="http://schemas.openxmlformats.org/drawingml/2006/main">
+            <a:srgbClr val="187FC3"/>
           </a:solidFill>
           <a:ln xmlns:a="http://schemas.openxmlformats.org/drawingml/2006/main" w="19050">
             <a:solidFill>
@@ -1517,7 +2184,193 @@
           <a:fontRef xmlns:a="http://schemas.openxmlformats.org/drawingml/2006/main" idx="major"/>
         </p:style>
         <p:txBody>
-          <a:bodyPr xmlns:a="http://schemas.openxmlformats.org/drawingml/2006/main" lIns="114300" tIns="76200" rIns="114300" bIns="76200" anchor="ctr">
+          <a:bodyPr xmlns:a="http://schemas.openxmlformats.org/drawingml/2006/main" lIns="0" tIns="0" rIns="0" bIns="0" anchor="ctr">
+            <a:normAutofit fontScale="100000"/>
+          </a:bodyPr>
+          <a:lstStyle xmlns:a="http://schemas.openxmlformats.org/drawingml/2006/main"/>
+          <a:p xmlns:a="http://schemas.openxmlformats.org/drawingml/2006/main">
+            <a:pPr algn="ctr">
+              <a:defRPr sz="1200" b="1">
+                <a:solidFill>
+                  <a:srgbClr val="FFFFFF"/>
+                </a:solidFill>
+                <a:latin typeface="Microsoft YaHei"/>
+                <a:ea typeface="Microsoft YaHei"/>
+                <a:cs typeface="Microsoft YaHei"/>
+              </a:defRPr>
+            </a:pPr>
+            <a:r>
+              <a:rPr sz="1200" b="1">
+                <a:solidFill>
+                  <a:srgbClr val="FFFFFF"/>
+                </a:solidFill>
+                <a:latin typeface="Microsoft YaHei"/>
+                <a:ea typeface="Microsoft YaHei"/>
+                <a:cs typeface="Microsoft YaHei"/>
+              </a:rPr>
+              <a:t>03</a:t>
+            </a:r>
+          </a:p>
+        </p:txBody>
+      </p:sp>
+      <p:sp>
+        <p:nvSpPr>
+          <p:cNvPr id="25" name="">
+            <a:extLst xmlns:a="http://schemas.openxmlformats.org/drawingml/2006/main">
+              <a:ext uri="{FF2B5EF4-FFF2-40B4-BE49-F238E27FC236}">
+                <a16:creationId xmlns:a16="http://schemas.microsoft.com/office/drawing/2014/main" id="{3AAEA4BF-9C9D-4D00-909D-C1E8B950A4F1}"/>
+              </a:ext>
+            </a:extLst>
+          </p:cNvPr>
+          <p:cNvSpPr>
+            <a:spLocks xmlns:a="http://schemas.openxmlformats.org/drawingml/2006/main" noGrp="1"/>
+          </p:cNvSpPr>
+          <p:nvPr/>
+        </p:nvSpPr>
+        <p:spPr>
+          <a:xfrm xmlns:a="http://schemas.openxmlformats.org/drawingml/2006/main">
+            <a:off x="7620000" y="3810000"/>
+            <a:ext cx="3562350" cy="785813"/>
+          </a:xfrm>
+          <a:prstGeom xmlns:a="http://schemas.openxmlformats.org/drawingml/2006/main" prst="rect">
+            <a:avLst/>
+          </a:prstGeom>
+          <a:noFill xmlns:a="http://schemas.openxmlformats.org/drawingml/2006/main"/>
+          <a:ln xmlns:a="http://schemas.openxmlformats.org/drawingml/2006/main" w="0">
+            <a:noFill/>
+            <a:prstDash val="solid"/>
+          </a:ln>
+        </p:spPr>
+        <p:txBody>
+          <a:bodyPr xmlns:a="http://schemas.openxmlformats.org/drawingml/2006/main" lIns="0" tIns="0" rIns="0" bIns="0" anchor="ctr">
+            <a:normAutofit fontScale="100000"/>
+          </a:bodyPr>
+          <a:lstStyle xmlns:a="http://schemas.openxmlformats.org/drawingml/2006/main"/>
+          <a:p xmlns:a="http://schemas.openxmlformats.org/drawingml/2006/main">
+            <a:pPr algn="l">
+              <a:defRPr sz="1200" b="0">
+                <a:solidFill>
+                  <a:srgbClr val="475569"/>
+                </a:solidFill>
+                <a:latin typeface="Microsoft YaHei"/>
+                <a:ea typeface="Microsoft YaHei"/>
+                <a:cs typeface="Microsoft YaHei"/>
+              </a:defRPr>
+            </a:pPr>
+            <a:r>
+              <a:rPr sz="1200" b="0">
+                <a:solidFill>
+                  <a:srgbClr val="475569"/>
+                </a:solidFill>
+                <a:latin typeface="Microsoft YaHei"/>
+                <a:ea typeface="Microsoft YaHei"/>
+                <a:cs typeface="Microsoft YaHei"/>
+              </a:rPr>
+              <a:t>提供可复用组件、版式和稳定的渲染能力</a:t>
+            </a:r>
+          </a:p>
+        </p:txBody>
+      </p:sp>
+      <p:sp>
+        <p:nvSpPr>
+          <p:cNvPr id="26" name="">
+            <a:extLst xmlns:a="http://schemas.openxmlformats.org/drawingml/2006/main">
+              <a:ext uri="{FF2B5EF4-FFF2-40B4-BE49-F238E27FC236}">
+                <a16:creationId xmlns:a16="http://schemas.microsoft.com/office/drawing/2014/main" id="{C2B4BD19-3688-46F7-9FC5-422473CCCFA1}"/>
+              </a:ext>
+            </a:extLst>
+          </p:cNvPr>
+          <p:cNvSpPr>
+            <a:spLocks xmlns:a="http://schemas.openxmlformats.org/drawingml/2006/main" noGrp="1"/>
+          </p:cNvSpPr>
+          <p:nvPr/>
+        </p:nvSpPr>
+        <p:spPr>
+          <a:xfrm xmlns:a="http://schemas.openxmlformats.org/drawingml/2006/main">
+            <a:off x="5486400" y="4207669"/>
+            <a:ext cx="742950" cy="0"/>
+          </a:xfrm>
+          <a:prstGeom xmlns:a="http://schemas.openxmlformats.org/drawingml/2006/main" prst="line">
+            <a:avLst/>
+          </a:prstGeom>
+          <a:noFill xmlns:a="http://schemas.openxmlformats.org/drawingml/2006/main"/>
+          <a:ln xmlns:a="http://schemas.openxmlformats.org/drawingml/2006/main" w="11430">
+            <a:solidFill>
+              <a:srgbClr val="9DBBD3"/>
+            </a:solidFill>
+            <a:prstDash val="dash"/>
+          </a:ln>
+        </p:spPr>
+      </p:sp>
+      <p:sp>
+        <p:nvSpPr>
+          <p:cNvPr id="27" name="PPAGENT_QA|parent=hierarchy-level-3|domains=hierarchy-shape,hierarchy-content">
+            <a:extLst xmlns:a="http://schemas.openxmlformats.org/drawingml/2006/main">
+              <a:ext uri="{FF2B5EF4-FFF2-40B4-BE49-F238E27FC236}">
+                <a16:creationId xmlns:a16="http://schemas.microsoft.com/office/drawing/2014/main" id="{9987FA0F-FDE7-452C-B4BA-DEBEAB00EE34}"/>
+              </a:ext>
+            </a:extLst>
+          </p:cNvPr>
+          <p:cNvSpPr>
+            <a:spLocks xmlns:a="http://schemas.openxmlformats.org/drawingml/2006/main" noGrp="1"/>
+          </p:cNvSpPr>
+          <p:nvPr/>
+        </p:nvSpPr>
+        <p:spPr>
+          <a:xfrm xmlns:a="http://schemas.openxmlformats.org/drawingml/2006/main">
+            <a:off x="704850" y="4776788"/>
+            <a:ext cx="5257800" cy="1042988"/>
+          </a:xfrm>
+          <a:prstGeom xmlns:a="http://schemas.openxmlformats.org/drawingml/2006/main" prst="trapezoid">
+            <a:avLst/>
+          </a:prstGeom>
+          <a:solidFill xmlns:a="http://schemas.openxmlformats.org/drawingml/2006/main">
+            <a:srgbClr val="185F9C"/>
+          </a:solidFill>
+          <a:ln xmlns:a="http://schemas.openxmlformats.org/drawingml/2006/main" w="19050">
+            <a:solidFill>
+              <a:srgbClr val="FFFFFF"/>
+            </a:solidFill>
+            <a:prstDash val="solid"/>
+          </a:ln>
+        </p:spPr>
+        <p:style>
+          <a:lnRef xmlns:a="http://schemas.openxmlformats.org/drawingml/2006/main" idx="0"/>
+          <a:fillRef xmlns:a="http://schemas.openxmlformats.org/drawingml/2006/main" idx="0"/>
+          <a:effectRef xmlns:a="http://schemas.openxmlformats.org/drawingml/2006/main" idx="4"/>
+          <a:fontRef xmlns:a="http://schemas.openxmlformats.org/drawingml/2006/main" idx="major"/>
+        </p:style>
+      </p:sp>
+      <p:sp>
+        <p:nvSpPr>
+          <p:cNvPr id="28" name="">
+            <a:extLst xmlns:a="http://schemas.openxmlformats.org/drawingml/2006/main">
+              <a:ext uri="{FF2B5EF4-FFF2-40B4-BE49-F238E27FC236}">
+                <a16:creationId xmlns:a16="http://schemas.microsoft.com/office/drawing/2014/main" id="{507C5E33-8781-45EA-A51C-6FF7ABC6DFE4}"/>
+              </a:ext>
+            </a:extLst>
+          </p:cNvPr>
+          <p:cNvSpPr>
+            <a:spLocks xmlns:a="http://schemas.openxmlformats.org/drawingml/2006/main" noGrp="1"/>
+          </p:cNvSpPr>
+          <p:nvPr/>
+        </p:nvSpPr>
+        <p:spPr>
+          <a:xfrm xmlns:a="http://schemas.openxmlformats.org/drawingml/2006/main">
+            <a:off x="857250" y="4900613"/>
+            <a:ext cx="4953000" cy="285750"/>
+          </a:xfrm>
+          <a:prstGeom xmlns:a="http://schemas.openxmlformats.org/drawingml/2006/main" prst="rect">
+            <a:avLst/>
+          </a:prstGeom>
+          <a:noFill xmlns:a="http://schemas.openxmlformats.org/drawingml/2006/main"/>
+          <a:ln xmlns:a="http://schemas.openxmlformats.org/drawingml/2006/main" w="0">
+            <a:noFill/>
+            <a:prstDash val="solid"/>
+          </a:ln>
+        </p:spPr>
+        <p:txBody>
+          <a:bodyPr xmlns:a="http://schemas.openxmlformats.org/drawingml/2006/main" lIns="0" tIns="0" rIns="0" bIns="0" anchor="ctr">
             <a:normAutofit fontScale="100000"/>
           </a:bodyPr>
           <a:lstStyle xmlns:a="http://schemas.openxmlformats.org/drawingml/2006/main"/>
@@ -1541,78 +2394,49 @@
                 <a:ea typeface="Microsoft YaHei"/>
                 <a:cs typeface="Microsoft YaHei"/>
               </a:rPr>
-              <a:t>支撑层</a:t>
-            </a:r>
-          </a:p>
-          <a:p xmlns:a="http://schemas.openxmlformats.org/drawingml/2006/main">
-            <a:pPr algn="ctr">
-              <a:defRPr sz="1500" b="1">
-                <a:solidFill>
-                  <a:srgbClr val="FFFFFF"/>
-                </a:solidFill>
-                <a:latin typeface="Microsoft YaHei"/>
-                <a:ea typeface="Microsoft YaHei"/>
-                <a:cs typeface="Microsoft YaHei"/>
-              </a:defRPr>
-            </a:pPr>
-            <a:r>
-              <a:rPr sz="1500" b="1">
-                <a:solidFill>
-                  <a:srgbClr val="FFFFFF"/>
-                </a:solidFill>
-                <a:latin typeface="Microsoft YaHei"/>
-                <a:ea typeface="Microsoft YaHei"/>
-                <a:cs typeface="Microsoft YaHei"/>
-              </a:rPr>
-              <a:t>30%</a:t>
+              <a:t>执行层</a:t>
             </a:r>
           </a:p>
         </p:txBody>
       </p:sp>
       <p:sp>
         <p:nvSpPr>
-          <p:cNvPr id="8" name="">
-            <a:extLst xmlns:a="http://schemas.openxmlformats.org/drawingml/2006/main">
-              <a:ext uri="{FF2B5EF4-FFF2-40B4-BE49-F238E27FC236}">
-                <a16:creationId xmlns:a16="http://schemas.microsoft.com/office/drawing/2014/main" id="{1BD50DE5-0807-42C3-AB05-1EE46D748DAC}"/>
-              </a:ext>
-            </a:extLst>
-          </p:cNvPr>
-          <p:cNvSpPr>
-            <a:spLocks xmlns:a="http://schemas.openxmlformats.org/drawingml/2006/main" noGrp="1"/>
-          </p:cNvSpPr>
-          <p:nvPr/>
-        </p:nvSpPr>
-        <p:spPr>
-          <a:xfrm xmlns:a="http://schemas.openxmlformats.org/drawingml/2006/main">
-            <a:off x="7048500" y="3886200"/>
-            <a:ext cx="4095750" cy="762000"/>
-          </a:xfrm>
-          <a:prstGeom xmlns:a="http://schemas.openxmlformats.org/drawingml/2006/main" prst="roundRect">
-            <a:avLst>
-              <a:gd name="adj" fmla="val 15000"/>
-            </a:avLst>
-          </a:prstGeom>
-          <a:solidFill xmlns:a="http://schemas.openxmlformats.org/drawingml/2006/main">
-            <a:srgbClr val="FFFFFF"/>
-          </a:solidFill>
-          <a:ln xmlns:a="http://schemas.openxmlformats.org/drawingml/2006/main" w="9525">
-            <a:solidFill>
-              <a:srgbClr val="C9D5E3"/>
-            </a:solidFill>
-            <a:prstDash val="dash"/>
+          <p:cNvPr id="29" name="">
+            <a:extLst xmlns:a="http://schemas.openxmlformats.org/drawingml/2006/main">
+              <a:ext uri="{FF2B5EF4-FFF2-40B4-BE49-F238E27FC236}">
+                <a16:creationId xmlns:a16="http://schemas.microsoft.com/office/drawing/2014/main" id="{D3977532-432A-4B21-A5D6-3F8E2F1E300C}"/>
+              </a:ext>
+            </a:extLst>
+          </p:cNvPr>
+          <p:cNvSpPr>
+            <a:spLocks xmlns:a="http://schemas.openxmlformats.org/drawingml/2006/main" noGrp="1"/>
+          </p:cNvSpPr>
+          <p:nvPr/>
+        </p:nvSpPr>
+        <p:spPr>
+          <a:xfrm xmlns:a="http://schemas.openxmlformats.org/drawingml/2006/main">
+            <a:off x="857250" y="5186363"/>
+            <a:ext cx="4953000" cy="238125"/>
+          </a:xfrm>
+          <a:prstGeom xmlns:a="http://schemas.openxmlformats.org/drawingml/2006/main" prst="rect">
+            <a:avLst/>
+          </a:prstGeom>
+          <a:noFill xmlns:a="http://schemas.openxmlformats.org/drawingml/2006/main"/>
+          <a:ln xmlns:a="http://schemas.openxmlformats.org/drawingml/2006/main" w="0">
+            <a:noFill/>
+            <a:prstDash val="solid"/>
           </a:ln>
         </p:spPr>
         <p:txBody>
-          <a:bodyPr xmlns:a="http://schemas.openxmlformats.org/drawingml/2006/main" lIns="114300" tIns="76200" rIns="114300" bIns="76200" anchor="ctr">
+          <a:bodyPr xmlns:a="http://schemas.openxmlformats.org/drawingml/2006/main" lIns="0" tIns="0" rIns="0" bIns="0" anchor="ctr">
             <a:normAutofit fontScale="100000"/>
           </a:bodyPr>
           <a:lstStyle xmlns:a="http://schemas.openxmlformats.org/drawingml/2006/main"/>
           <a:p xmlns:a="http://schemas.openxmlformats.org/drawingml/2006/main">
-            <a:pPr algn="l">
-              <a:defRPr sz="1275" b="0">
-                <a:solidFill>
-                  <a:srgbClr val="475569"/>
+            <a:pPr algn="ctr">
+              <a:defRPr sz="1350" b="1">
+                <a:solidFill>
+                  <a:srgbClr val="DFF9FB"/>
                 </a:solidFill>
                 <a:latin typeface="Microsoft YaHei"/>
                 <a:ea typeface="Microsoft YaHei"/>
@@ -1620,43 +2444,78 @@
               </a:defRPr>
             </a:pPr>
             <a:r>
-              <a:rPr sz="1275" b="0">
-                <a:solidFill>
-                  <a:srgbClr val="475569"/>
+              <a:rPr sz="1350" b="1">
+                <a:solidFill>
+                  <a:srgbClr val="DFF9FB"/>
                 </a:solidFill>
                 <a:latin typeface="Microsoft YaHei"/>
                 <a:ea typeface="Microsoft YaHei"/>
                 <a:cs typeface="Microsoft YaHei"/>
               </a:rPr>
-              <a:t>负责协作、保障和能力建设</a:t>
+              <a:t>DO</a:t>
             </a:r>
           </a:p>
         </p:txBody>
       </p:sp>
       <p:sp>
         <p:nvSpPr>
-          <p:cNvPr id="9" name="">
-            <a:extLst xmlns:a="http://schemas.openxmlformats.org/drawingml/2006/main">
-              <a:ext uri="{FF2B5EF4-FFF2-40B4-BE49-F238E27FC236}">
-                <a16:creationId xmlns:a16="http://schemas.microsoft.com/office/drawing/2014/main" id="{27B172D5-E93C-41AA-8AA6-C57343CCF9BE}"/>
-              </a:ext>
-            </a:extLst>
-          </p:cNvPr>
-          <p:cNvSpPr>
-            <a:spLocks xmlns:a="http://schemas.openxmlformats.org/drawingml/2006/main" noGrp="1"/>
-          </p:cNvSpPr>
-          <p:nvPr/>
-        </p:nvSpPr>
-        <p:spPr>
-          <a:xfrm xmlns:a="http://schemas.openxmlformats.org/drawingml/2006/main">
-            <a:off x="857250" y="4914900"/>
-            <a:ext cx="5429250" cy="1047750"/>
-          </a:xfrm>
-          <a:prstGeom xmlns:a="http://schemas.openxmlformats.org/drawingml/2006/main" prst="trapezoid">
-            <a:avLst/>
+          <p:cNvPr id="30" name="PPAGENT_QA|parent=hierarchy-note-3|domains=hierarchy-note,hierarchy-content">
+            <a:extLst xmlns:a="http://schemas.openxmlformats.org/drawingml/2006/main">
+              <a:ext uri="{FF2B5EF4-FFF2-40B4-BE49-F238E27FC236}">
+                <a16:creationId xmlns:a16="http://schemas.microsoft.com/office/drawing/2014/main" id="{6020DEDF-51E4-45F4-9F58-47F9289B6D5B}"/>
+              </a:ext>
+            </a:extLst>
+          </p:cNvPr>
+          <p:cNvSpPr>
+            <a:spLocks xmlns:a="http://schemas.openxmlformats.org/drawingml/2006/main" noGrp="1"/>
+          </p:cNvSpPr>
+          <p:nvPr/>
+        </p:nvSpPr>
+        <p:spPr>
+          <a:xfrm xmlns:a="http://schemas.openxmlformats.org/drawingml/2006/main">
+            <a:off x="6838950" y="4795838"/>
+            <a:ext cx="4629150" cy="995363"/>
+          </a:xfrm>
+          <a:prstGeom xmlns:a="http://schemas.openxmlformats.org/drawingml/2006/main" prst="roundRect">
+            <a:avLst>
+              <a:gd name="adj" fmla="val 11483"/>
+            </a:avLst>
           </a:prstGeom>
           <a:solidFill xmlns:a="http://schemas.openxmlformats.org/drawingml/2006/main">
-            <a:srgbClr val="17406D"/>
+            <a:srgbClr val="F2F7FB"/>
+          </a:solidFill>
+          <a:ln xmlns:a="http://schemas.openxmlformats.org/drawingml/2006/main" w="9525">
+            <a:solidFill>
+              <a:srgbClr val="D8E5EF"/>
+            </a:solidFill>
+            <a:prstDash val="solid"/>
+          </a:ln>
+        </p:spPr>
+      </p:sp>
+      <p:sp>
+        <p:nvSpPr>
+          <p:cNvPr id="31" name="">
+            <a:extLst xmlns:a="http://schemas.openxmlformats.org/drawingml/2006/main">
+              <a:ext uri="{FF2B5EF4-FFF2-40B4-BE49-F238E27FC236}">
+                <a16:creationId xmlns:a16="http://schemas.microsoft.com/office/drawing/2014/main" id="{ADDF3996-6D1A-4EDA-9C80-31D2BBFF3611}"/>
+              </a:ext>
+            </a:extLst>
+          </p:cNvPr>
+          <p:cNvSpPr>
+            <a:spLocks xmlns:a="http://schemas.openxmlformats.org/drawingml/2006/main" noGrp="1"/>
+          </p:cNvSpPr>
+          <p:nvPr/>
+        </p:nvSpPr>
+        <p:spPr>
+          <a:xfrm xmlns:a="http://schemas.openxmlformats.org/drawingml/2006/main">
+            <a:off x="7048500" y="5131594"/>
+            <a:ext cx="381000" cy="381000"/>
+          </a:xfrm>
+          <a:prstGeom xmlns:a="http://schemas.openxmlformats.org/drawingml/2006/main" prst="ellipse">
+            <a:avLst/>
+          </a:prstGeom>
+          <a:solidFill xmlns:a="http://schemas.openxmlformats.org/drawingml/2006/main">
+            <a:srgbClr val="185F9C"/>
           </a:solidFill>
           <a:ln xmlns:a="http://schemas.openxmlformats.org/drawingml/2006/main" w="19050">
             <a:solidFill>
@@ -1672,13 +2531,13 @@
           <a:fontRef xmlns:a="http://schemas.openxmlformats.org/drawingml/2006/main" idx="major"/>
         </p:style>
         <p:txBody>
-          <a:bodyPr xmlns:a="http://schemas.openxmlformats.org/drawingml/2006/main" lIns="114300" tIns="76200" rIns="114300" bIns="76200" anchor="ctr">
+          <a:bodyPr xmlns:a="http://schemas.openxmlformats.org/drawingml/2006/main" lIns="0" tIns="0" rIns="0" bIns="0" anchor="ctr">
             <a:normAutofit fontScale="100000"/>
           </a:bodyPr>
           <a:lstStyle xmlns:a="http://schemas.openxmlformats.org/drawingml/2006/main"/>
           <a:p xmlns:a="http://schemas.openxmlformats.org/drawingml/2006/main">
             <a:pPr algn="ctr">
-              <a:defRPr sz="1500" b="1">
+              <a:defRPr sz="1200" b="1">
                 <a:solidFill>
                   <a:srgbClr val="FFFFFF"/>
                 </a:solidFill>
@@ -1688,7 +2547,7 @@
               </a:defRPr>
             </a:pPr>
             <a:r>
-              <a:rPr sz="1500" b="1">
+              <a:rPr sz="1200" b="1">
                 <a:solidFill>
                   <a:srgbClr val="FFFFFF"/>
                 </a:solidFill>
@@ -1696,76 +2555,47 @@
                 <a:ea typeface="Microsoft YaHei"/>
                 <a:cs typeface="Microsoft YaHei"/>
               </a:rPr>
-              <a:t>基础层</a:t>
-            </a:r>
-          </a:p>
-          <a:p xmlns:a="http://schemas.openxmlformats.org/drawingml/2006/main">
-            <a:pPr algn="ctr">
-              <a:defRPr sz="1500" b="1">
-                <a:solidFill>
-                  <a:srgbClr val="FFFFFF"/>
-                </a:solidFill>
-                <a:latin typeface="Microsoft YaHei"/>
-                <a:ea typeface="Microsoft YaHei"/>
-                <a:cs typeface="Microsoft YaHei"/>
-              </a:defRPr>
-            </a:pPr>
-            <a:r>
-              <a:rPr sz="1500" b="1">
-                <a:solidFill>
-                  <a:srgbClr val="FFFFFF"/>
-                </a:solidFill>
-                <a:latin typeface="Microsoft YaHei"/>
-                <a:ea typeface="Microsoft YaHei"/>
-                <a:cs typeface="Microsoft YaHei"/>
-              </a:rPr>
-              <a:t>40%</a:t>
+              <a:t>04</a:t>
             </a:r>
           </a:p>
         </p:txBody>
       </p:sp>
       <p:sp>
         <p:nvSpPr>
-          <p:cNvPr id="10" name="">
-            <a:extLst xmlns:a="http://schemas.openxmlformats.org/drawingml/2006/main">
-              <a:ext uri="{FF2B5EF4-FFF2-40B4-BE49-F238E27FC236}">
-                <a16:creationId xmlns:a16="http://schemas.microsoft.com/office/drawing/2014/main" id="{3B2FADB9-20D7-436D-95EA-61F8CB85C511}"/>
-              </a:ext>
-            </a:extLst>
-          </p:cNvPr>
-          <p:cNvSpPr>
-            <a:spLocks xmlns:a="http://schemas.openxmlformats.org/drawingml/2006/main" noGrp="1"/>
-          </p:cNvSpPr>
-          <p:nvPr/>
-        </p:nvSpPr>
-        <p:spPr>
-          <a:xfrm xmlns:a="http://schemas.openxmlformats.org/drawingml/2006/main">
-            <a:off x="7048500" y="5048250"/>
-            <a:ext cx="4095750" cy="762000"/>
-          </a:xfrm>
-          <a:prstGeom xmlns:a="http://schemas.openxmlformats.org/drawingml/2006/main" prst="roundRect">
-            <a:avLst>
-              <a:gd name="adj" fmla="val 15000"/>
-            </a:avLst>
-          </a:prstGeom>
-          <a:solidFill xmlns:a="http://schemas.openxmlformats.org/drawingml/2006/main">
-            <a:srgbClr val="FFFFFF"/>
-          </a:solidFill>
-          <a:ln xmlns:a="http://schemas.openxmlformats.org/drawingml/2006/main" w="9525">
-            <a:solidFill>
-              <a:srgbClr val="C9D5E3"/>
-            </a:solidFill>
-            <a:prstDash val="dash"/>
+          <p:cNvPr id="32" name="">
+            <a:extLst xmlns:a="http://schemas.openxmlformats.org/drawingml/2006/main">
+              <a:ext uri="{FF2B5EF4-FFF2-40B4-BE49-F238E27FC236}">
+                <a16:creationId xmlns:a16="http://schemas.microsoft.com/office/drawing/2014/main" id="{28AEAB7C-BAF4-4A40-8021-7C5CC2E0A43C}"/>
+              </a:ext>
+            </a:extLst>
+          </p:cNvPr>
+          <p:cNvSpPr>
+            <a:spLocks xmlns:a="http://schemas.openxmlformats.org/drawingml/2006/main" noGrp="1"/>
+          </p:cNvSpPr>
+          <p:nvPr/>
+        </p:nvSpPr>
+        <p:spPr>
+          <a:xfrm xmlns:a="http://schemas.openxmlformats.org/drawingml/2006/main">
+            <a:off x="7620000" y="4900613"/>
+            <a:ext cx="3562350" cy="785813"/>
+          </a:xfrm>
+          <a:prstGeom xmlns:a="http://schemas.openxmlformats.org/drawingml/2006/main" prst="rect">
+            <a:avLst/>
+          </a:prstGeom>
+          <a:noFill xmlns:a="http://schemas.openxmlformats.org/drawingml/2006/main"/>
+          <a:ln xmlns:a="http://schemas.openxmlformats.org/drawingml/2006/main" w="0">
+            <a:noFill/>
+            <a:prstDash val="solid"/>
           </a:ln>
         </p:spPr>
         <p:txBody>
-          <a:bodyPr xmlns:a="http://schemas.openxmlformats.org/drawingml/2006/main" lIns="114300" tIns="76200" rIns="114300" bIns="76200" anchor="ctr">
+          <a:bodyPr xmlns:a="http://schemas.openxmlformats.org/drawingml/2006/main" lIns="0" tIns="0" rIns="0" bIns="0" anchor="ctr">
             <a:normAutofit fontScale="100000"/>
           </a:bodyPr>
           <a:lstStyle xmlns:a="http://schemas.openxmlformats.org/drawingml/2006/main"/>
           <a:p xmlns:a="http://schemas.openxmlformats.org/drawingml/2006/main">
             <a:pPr algn="l">
-              <a:defRPr sz="1275" b="0">
+              <a:defRPr sz="1200" b="0">
                 <a:solidFill>
                   <a:srgbClr val="475569"/>
                 </a:solidFill>
@@ -1775,7 +2605,7 @@
               </a:defRPr>
             </a:pPr>
             <a:r>
-              <a:rPr sz="1275" b="0">
+              <a:rPr sz="1200" b="0">
                 <a:solidFill>
                   <a:srgbClr val="475569"/>
                 </a:solidFill>
@@ -1783,15 +2613,46 @@
                 <a:ea typeface="Microsoft YaHei"/>
                 <a:cs typeface="Microsoft YaHei"/>
               </a:rPr>
-              <a:t>负责日常执行与广泛覆盖</a:t>
+              <a:t>根据真实稿件完成生成、检查与最终交付</a:t>
             </a:r>
           </a:p>
         </p:txBody>
       </p:sp>
+      <p:sp>
+        <p:nvSpPr>
+          <p:cNvPr id="33" name="">
+            <a:extLst xmlns:a="http://schemas.openxmlformats.org/drawingml/2006/main">
+              <a:ext uri="{FF2B5EF4-FFF2-40B4-BE49-F238E27FC236}">
+                <a16:creationId xmlns:a16="http://schemas.microsoft.com/office/drawing/2014/main" id="{37191625-D45E-4894-96B7-E9DAA3D887F2}"/>
+              </a:ext>
+            </a:extLst>
+          </p:cNvPr>
+          <p:cNvSpPr>
+            <a:spLocks xmlns:a="http://schemas.openxmlformats.org/drawingml/2006/main" noGrp="1"/>
+          </p:cNvSpPr>
+          <p:nvPr/>
+        </p:nvSpPr>
+        <p:spPr>
+          <a:xfrm xmlns:a="http://schemas.openxmlformats.org/drawingml/2006/main">
+            <a:off x="6076950" y="5298281"/>
+            <a:ext cx="742950" cy="0"/>
+          </a:xfrm>
+          <a:prstGeom xmlns:a="http://schemas.openxmlformats.org/drawingml/2006/main" prst="line">
+            <a:avLst/>
+          </a:prstGeom>
+          <a:noFill xmlns:a="http://schemas.openxmlformats.org/drawingml/2006/main"/>
+          <a:ln xmlns:a="http://schemas.openxmlformats.org/drawingml/2006/main" w="11430">
+            <a:solidFill>
+              <a:srgbClr val="9DBBD3"/>
+            </a:solidFill>
+            <a:prstDash val="dash"/>
+          </a:ln>
+        </p:spPr>
+      </p:sp>
     </p:spTree>
     <p:extLst>
       <p:ext uri="{BB962C8B-B14F-4D97-AF65-F5344CB8AC3E}">
-        <p14:creationId xmlns:p14="http://schemas.microsoft.com/office/powerpoint/2010/main" val="1515432790"/>
+        <p14:creationId xmlns:p14="http://schemas.microsoft.com/office/powerpoint/2010/main" val="978772290"/>
       </p:ext>
     </p:extLst>
   </p:cSld>
